--- a/Planning docs/Slides/lesson-24-1-teacher-slides.pptx
+++ b/Planning docs/Slides/lesson-24-1-teacher-slides.pptx
@@ -4980,7 +4980,7 @@
                 <a:ea typeface="Calibri" pitchFamily="34" charset="-122"/>
                 <a:cs typeface="Calibri" pitchFamily="34" charset="-120"/>
               </a:rPr>
-              <a:t>•  Explaining facts in your own words</a:t>
+              <a:t>•  The article says every part of the castle's design was meant to stop enemies. Find one cause-and-effect pair: one design feature (cause) and the defensive result (effect).</a:t>
             </a:r>
             <a:endParaRPr lang="en-US" sz="1500" dirty="0"/>
           </a:p>
@@ -4997,24 +4997,7 @@
                 <a:ea typeface="Calibri" pitchFamily="34" charset="-122"/>
                 <a:cs typeface="Calibri" pitchFamily="34" charset="-120"/>
               </a:rPr>
-              <a:t>•  Look at the letters around the dot in each word. Count: vowel, consonant, consonant, vowel. That's the VCCV pattern .</a:t>
-            </a:r>
-            <a:endParaRPr lang="en-US" sz="1500" dirty="0"/>
-          </a:p>
-          <a:p>
-            <a:pPr indent="0" marL="0">
-              <a:buNone/>
-            </a:pPr>
-            <a:r>
-              <a:rPr lang="en-US" sz="1500" dirty="0">
-                <a:solidFill>
-                  <a:srgbClr val="1E293B"/>
-                </a:solidFill>
-                <a:latin typeface="Calibri" pitchFamily="34" charset="0"/>
-                <a:ea typeface="Calibri" pitchFamily="34" charset="-122"/>
-                <a:cs typeface="Calibri" pitchFamily="34" charset="-120"/>
-              </a:rPr>
-              <a:t>•  Where does the dot fall — before, between, or after the two consonants?</a:t>
+              <a:t>•  Building a large castle could take 10–30 years. Why do you think medieval lords were willing to spend that long?</a:t>
             </a:r>
             <a:endParaRPr lang="en-US" sz="1500" dirty="0"/>
           </a:p>
